--- a/docs/pptx/carbo/ritu-carbo-adjcif-anyhosp.pptx
+++ b/docs/pptx/carbo/ritu-carbo-adjcif-anyhosp.pptx
@@ -2271,7 +2271,7 @@
           </p:nvSpPr>
           <p:spPr>
             <a:xfrm>
-              <a:off x="910695" y="5125501"/>
+              <a:off x="910695" y="5130563"/>
               <a:ext cx="7706515" cy="0"/>
             </a:xfrm>
             <a:custGeom>
@@ -2314,7 +2314,7 @@
           </p:nvSpPr>
           <p:spPr>
             <a:xfrm>
-              <a:off x="910695" y="4215661"/>
+              <a:off x="910695" y="4230846"/>
               <a:ext cx="7706515" cy="0"/>
             </a:xfrm>
             <a:custGeom>
@@ -2357,7 +2357,7 @@
           </p:nvSpPr>
           <p:spPr>
             <a:xfrm>
-              <a:off x="910695" y="3305820"/>
+              <a:off x="910695" y="3331128"/>
               <a:ext cx="7706515" cy="0"/>
             </a:xfrm>
             <a:custGeom>
@@ -2615,7 +2615,7 @@
           </p:nvSpPr>
           <p:spPr>
             <a:xfrm>
-              <a:off x="910695" y="4670581"/>
+              <a:off x="910695" y="4680704"/>
               <a:ext cx="7706515" cy="0"/>
             </a:xfrm>
             <a:custGeom>
@@ -2658,7 +2658,7 @@
           </p:nvSpPr>
           <p:spPr>
             <a:xfrm>
-              <a:off x="910695" y="3760740"/>
+              <a:off x="910695" y="3780987"/>
               <a:ext cx="7706515" cy="0"/>
             </a:xfrm>
             <a:custGeom>
@@ -2701,7 +2701,7 @@
           </p:nvSpPr>
           <p:spPr>
             <a:xfrm>
-              <a:off x="910695" y="2850899"/>
+              <a:off x="910695" y="2881270"/>
               <a:ext cx="7706515" cy="0"/>
             </a:xfrm>
             <a:custGeom>
@@ -2873,210 +2873,210 @@
           </p:nvSpPr>
           <p:spPr>
             <a:xfrm>
-              <a:off x="1260991" y="4107526"/>
-              <a:ext cx="7005923" cy="1432992"/>
+              <a:off x="1260991" y="4116880"/>
+              <a:ext cx="7005923" cy="1423966"/>
             </a:xfrm>
             <a:custGeom>
               <a:avLst/>
               <a:pathLst>
-                <a:path w="7005923" h="1432992">
+                <a:path w="7005923" h="1423966">
                   <a:moveTo>
-                    <a:pt x="0" y="1432992"/>
+                    <a:pt x="0" y="1423966"/>
                   </a:moveTo>
                   <a:lnTo>
-                    <a:pt x="175148" y="1432992"/>
-                  </a:lnTo>
-                  <a:lnTo>
-                    <a:pt x="175148" y="1393305"/>
-                  </a:lnTo>
-                  <a:lnTo>
-                    <a:pt x="262722" y="1393305"/>
-                  </a:lnTo>
-                  <a:lnTo>
-                    <a:pt x="262722" y="1353636"/>
-                  </a:lnTo>
-                  <a:lnTo>
-                    <a:pt x="350296" y="1353636"/>
-                  </a:lnTo>
-                  <a:lnTo>
-                    <a:pt x="350296" y="1314129"/>
-                  </a:lnTo>
-                  <a:lnTo>
-                    <a:pt x="700592" y="1314129"/>
-                  </a:lnTo>
-                  <a:lnTo>
-                    <a:pt x="700592" y="1235387"/>
-                  </a:lnTo>
-                  <a:lnTo>
-                    <a:pt x="788166" y="1235387"/>
-                  </a:lnTo>
-                  <a:lnTo>
-                    <a:pt x="788166" y="1195939"/>
-                  </a:lnTo>
-                  <a:lnTo>
-                    <a:pt x="1050888" y="1195939"/>
-                  </a:lnTo>
-                  <a:lnTo>
-                    <a:pt x="1050888" y="1156791"/>
-                  </a:lnTo>
-                  <a:lnTo>
-                    <a:pt x="1401184" y="1156791"/>
-                  </a:lnTo>
-                  <a:lnTo>
-                    <a:pt x="1401184" y="1117774"/>
-                  </a:lnTo>
-                  <a:lnTo>
-                    <a:pt x="1488758" y="1117774"/>
-                  </a:lnTo>
-                  <a:lnTo>
-                    <a:pt x="1488758" y="1079017"/>
-                  </a:lnTo>
-                  <a:lnTo>
-                    <a:pt x="1663906" y="1079017"/>
-                  </a:lnTo>
-                  <a:lnTo>
-                    <a:pt x="1663906" y="1040403"/>
-                  </a:lnTo>
-                  <a:lnTo>
-                    <a:pt x="1926628" y="1040403"/>
-                  </a:lnTo>
-                  <a:lnTo>
-                    <a:pt x="1926628" y="963877"/>
-                  </a:lnTo>
-                  <a:lnTo>
-                    <a:pt x="2101777" y="963877"/>
-                  </a:lnTo>
-                  <a:lnTo>
-                    <a:pt x="2101777" y="924631"/>
-                  </a:lnTo>
-                  <a:lnTo>
-                    <a:pt x="2364499" y="924631"/>
-                  </a:lnTo>
-                  <a:lnTo>
-                    <a:pt x="2364499" y="885602"/>
-                  </a:lnTo>
-                  <a:lnTo>
-                    <a:pt x="3065091" y="885602"/>
-                  </a:lnTo>
-                  <a:lnTo>
-                    <a:pt x="3065091" y="845802"/>
-                  </a:lnTo>
-                  <a:lnTo>
-                    <a:pt x="3240239" y="845802"/>
-                  </a:lnTo>
-                  <a:lnTo>
-                    <a:pt x="3240239" y="805016"/>
-                  </a:lnTo>
-                  <a:lnTo>
-                    <a:pt x="3502961" y="805016"/>
-                  </a:lnTo>
-                  <a:lnTo>
-                    <a:pt x="3502961" y="764105"/>
-                  </a:lnTo>
-                  <a:lnTo>
-                    <a:pt x="3853257" y="764105"/>
-                  </a:lnTo>
-                  <a:lnTo>
-                    <a:pt x="3853257" y="723195"/>
-                  </a:lnTo>
-                  <a:lnTo>
-                    <a:pt x="4028405" y="723195"/>
-                  </a:lnTo>
-                  <a:lnTo>
-                    <a:pt x="4028405" y="681439"/>
-                  </a:lnTo>
-                  <a:lnTo>
-                    <a:pt x="4291128" y="681439"/>
-                  </a:lnTo>
-                  <a:lnTo>
-                    <a:pt x="4291128" y="639795"/>
-                  </a:lnTo>
-                  <a:lnTo>
-                    <a:pt x="4466276" y="639795"/>
-                  </a:lnTo>
-                  <a:lnTo>
-                    <a:pt x="4466276" y="598141"/>
-                  </a:lnTo>
-                  <a:lnTo>
-                    <a:pt x="4641424" y="598141"/>
-                  </a:lnTo>
-                  <a:lnTo>
-                    <a:pt x="4641424" y="555271"/>
-                  </a:lnTo>
-                  <a:lnTo>
-                    <a:pt x="5342016" y="555271"/>
-                  </a:lnTo>
-                  <a:lnTo>
-                    <a:pt x="5342016" y="512515"/>
-                  </a:lnTo>
-                  <a:lnTo>
-                    <a:pt x="5429590" y="512515"/>
-                  </a:lnTo>
-                  <a:lnTo>
-                    <a:pt x="5429590" y="469560"/>
-                  </a:lnTo>
-                  <a:lnTo>
-                    <a:pt x="5692312" y="469560"/>
-                  </a:lnTo>
-                  <a:lnTo>
-                    <a:pt x="5692312" y="426964"/>
-                  </a:lnTo>
-                  <a:lnTo>
-                    <a:pt x="5779886" y="426964"/>
-                  </a:lnTo>
-                  <a:lnTo>
-                    <a:pt x="5779886" y="384639"/>
-                  </a:lnTo>
-                  <a:lnTo>
-                    <a:pt x="5867460" y="384639"/>
-                  </a:lnTo>
-                  <a:lnTo>
-                    <a:pt x="5867460" y="342211"/>
-                  </a:lnTo>
-                  <a:lnTo>
-                    <a:pt x="6042608" y="342211"/>
-                  </a:lnTo>
-                  <a:lnTo>
-                    <a:pt x="6042608" y="299763"/>
-                  </a:lnTo>
-                  <a:lnTo>
-                    <a:pt x="6130182" y="299763"/>
-                  </a:lnTo>
-                  <a:lnTo>
-                    <a:pt x="6130182" y="257530"/>
-                  </a:lnTo>
-                  <a:lnTo>
-                    <a:pt x="6217757" y="257530"/>
-                  </a:lnTo>
-                  <a:lnTo>
-                    <a:pt x="6217757" y="215085"/>
-                  </a:lnTo>
-                  <a:lnTo>
-                    <a:pt x="6305331" y="215085"/>
-                  </a:lnTo>
-                  <a:lnTo>
-                    <a:pt x="6305331" y="172374"/>
-                  </a:lnTo>
-                  <a:lnTo>
-                    <a:pt x="6480479" y="172374"/>
-                  </a:lnTo>
-                  <a:lnTo>
-                    <a:pt x="6480479" y="129050"/>
-                  </a:lnTo>
-                  <a:lnTo>
-                    <a:pt x="6568053" y="129050"/>
-                  </a:lnTo>
-                  <a:lnTo>
-                    <a:pt x="6568053" y="85931"/>
-                  </a:lnTo>
-                  <a:lnTo>
-                    <a:pt x="6743201" y="85931"/>
-                  </a:lnTo>
-                  <a:lnTo>
-                    <a:pt x="6743201" y="43086"/>
-                  </a:lnTo>
-                  <a:lnTo>
-                    <a:pt x="7005923" y="43086"/>
+                    <a:pt x="175148" y="1423966"/>
+                  </a:lnTo>
+                  <a:lnTo>
+                    <a:pt x="175148" y="1384604"/>
+                  </a:lnTo>
+                  <a:lnTo>
+                    <a:pt x="262722" y="1384604"/>
+                  </a:lnTo>
+                  <a:lnTo>
+                    <a:pt x="262722" y="1345257"/>
+                  </a:lnTo>
+                  <a:lnTo>
+                    <a:pt x="350296" y="1345257"/>
+                  </a:lnTo>
+                  <a:lnTo>
+                    <a:pt x="350296" y="1306065"/>
+                  </a:lnTo>
+                  <a:lnTo>
+                    <a:pt x="700592" y="1306065"/>
+                  </a:lnTo>
+                  <a:lnTo>
+                    <a:pt x="700592" y="1227932"/>
+                  </a:lnTo>
+                  <a:lnTo>
+                    <a:pt x="788166" y="1227932"/>
+                  </a:lnTo>
+                  <a:lnTo>
+                    <a:pt x="788166" y="1188793"/>
+                  </a:lnTo>
+                  <a:lnTo>
+                    <a:pt x="1050888" y="1188793"/>
+                  </a:lnTo>
+                  <a:lnTo>
+                    <a:pt x="1050888" y="1149953"/>
+                  </a:lnTo>
+                  <a:lnTo>
+                    <a:pt x="1401184" y="1149953"/>
+                  </a:lnTo>
+                  <a:lnTo>
+                    <a:pt x="1401184" y="1111239"/>
+                  </a:lnTo>
+                  <a:lnTo>
+                    <a:pt x="1488758" y="1111239"/>
+                  </a:lnTo>
+                  <a:lnTo>
+                    <a:pt x="1488758" y="1072780"/>
+                  </a:lnTo>
+                  <a:lnTo>
+                    <a:pt x="1663906" y="1072780"/>
+                  </a:lnTo>
+                  <a:lnTo>
+                    <a:pt x="1663906" y="1034428"/>
+                  </a:lnTo>
+                  <a:lnTo>
+                    <a:pt x="1926628" y="1034428"/>
+                  </a:lnTo>
+                  <a:lnTo>
+                    <a:pt x="1926628" y="958422"/>
+                  </a:lnTo>
+                  <a:lnTo>
+                    <a:pt x="2101777" y="958422"/>
+                  </a:lnTo>
+                  <a:lnTo>
+                    <a:pt x="2101777" y="919382"/>
+                  </a:lnTo>
+                  <a:lnTo>
+                    <a:pt x="2364499" y="919382"/>
+                  </a:lnTo>
+                  <a:lnTo>
+                    <a:pt x="2364499" y="880557"/>
+                  </a:lnTo>
+                  <a:lnTo>
+                    <a:pt x="3065091" y="880557"/>
+                  </a:lnTo>
+                  <a:lnTo>
+                    <a:pt x="3065091" y="840924"/>
+                  </a:lnTo>
+                  <a:lnTo>
+                    <a:pt x="3240239" y="840924"/>
+                  </a:lnTo>
+                  <a:lnTo>
+                    <a:pt x="3240239" y="800357"/>
+                  </a:lnTo>
+                  <a:lnTo>
+                    <a:pt x="3502961" y="800357"/>
+                  </a:lnTo>
+                  <a:lnTo>
+                    <a:pt x="3502961" y="759681"/>
+                  </a:lnTo>
+                  <a:lnTo>
+                    <a:pt x="3853257" y="759681"/>
+                  </a:lnTo>
+                  <a:lnTo>
+                    <a:pt x="3853257" y="719016"/>
+                  </a:lnTo>
+                  <a:lnTo>
+                    <a:pt x="4028405" y="719016"/>
+                  </a:lnTo>
+                  <a:lnTo>
+                    <a:pt x="4028405" y="677511"/>
+                  </a:lnTo>
+                  <a:lnTo>
+                    <a:pt x="4291128" y="677511"/>
+                  </a:lnTo>
+                  <a:lnTo>
+                    <a:pt x="4291128" y="636112"/>
+                  </a:lnTo>
+                  <a:lnTo>
+                    <a:pt x="4466276" y="636112"/>
+                  </a:lnTo>
+                  <a:lnTo>
+                    <a:pt x="4466276" y="594689"/>
+                  </a:lnTo>
+                  <a:lnTo>
+                    <a:pt x="4641424" y="594689"/>
+                  </a:lnTo>
+                  <a:lnTo>
+                    <a:pt x="4641424" y="552028"/>
+                  </a:lnTo>
+                  <a:lnTo>
+                    <a:pt x="5342016" y="552028"/>
+                  </a:lnTo>
+                  <a:lnTo>
+                    <a:pt x="5342016" y="509494"/>
+                  </a:lnTo>
+                  <a:lnTo>
+                    <a:pt x="5429590" y="509494"/>
+                  </a:lnTo>
+                  <a:lnTo>
+                    <a:pt x="5429590" y="466780"/>
+                  </a:lnTo>
+                  <a:lnTo>
+                    <a:pt x="5692312" y="466780"/>
+                  </a:lnTo>
+                  <a:lnTo>
+                    <a:pt x="5692312" y="424423"/>
+                  </a:lnTo>
+                  <a:lnTo>
+                    <a:pt x="5779886" y="424423"/>
+                  </a:lnTo>
+                  <a:lnTo>
+                    <a:pt x="5779886" y="382338"/>
+                  </a:lnTo>
+                  <a:lnTo>
+                    <a:pt x="5867460" y="382338"/>
+                  </a:lnTo>
+                  <a:lnTo>
+                    <a:pt x="5867460" y="340153"/>
+                  </a:lnTo>
+                  <a:lnTo>
+                    <a:pt x="6042608" y="340153"/>
+                  </a:lnTo>
+                  <a:lnTo>
+                    <a:pt x="6042608" y="297958"/>
+                  </a:lnTo>
+                  <a:lnTo>
+                    <a:pt x="6130182" y="297958"/>
+                  </a:lnTo>
+                  <a:lnTo>
+                    <a:pt x="6130182" y="255974"/>
+                  </a:lnTo>
+                  <a:lnTo>
+                    <a:pt x="6217757" y="255974"/>
+                  </a:lnTo>
+                  <a:lnTo>
+                    <a:pt x="6217757" y="213777"/>
+                  </a:lnTo>
+                  <a:lnTo>
+                    <a:pt x="6305331" y="213777"/>
+                  </a:lnTo>
+                  <a:lnTo>
+                    <a:pt x="6305331" y="171325"/>
+                  </a:lnTo>
+                  <a:lnTo>
+                    <a:pt x="6480479" y="171325"/>
+                  </a:lnTo>
+                  <a:lnTo>
+                    <a:pt x="6480479" y="128261"/>
+                  </a:lnTo>
+                  <a:lnTo>
+                    <a:pt x="6568053" y="128261"/>
+                  </a:lnTo>
+                  <a:lnTo>
+                    <a:pt x="6568053" y="85405"/>
+                  </a:lnTo>
+                  <a:lnTo>
+                    <a:pt x="6743201" y="85405"/>
+                  </a:lnTo>
+                  <a:lnTo>
+                    <a:pt x="6743201" y="42819"/>
+                  </a:lnTo>
+                  <a:lnTo>
+                    <a:pt x="7005923" y="42819"/>
                   </a:lnTo>
                   <a:lnTo>
                     <a:pt x="7005923" y="0"/>
@@ -3109,209 +3109,209 @@
           <p:spPr>
             <a:xfrm>
               <a:off x="1260991" y="2861938"/>
-              <a:ext cx="7005923" cy="2631816"/>
+              <a:ext cx="7005923" cy="2631786"/>
             </a:xfrm>
             <a:custGeom>
               <a:avLst/>
               <a:pathLst>
-                <a:path w="7005923" h="2631816">
+                <a:path w="7005923" h="2631786">
                   <a:moveTo>
-                    <a:pt x="0" y="2631816"/>
+                    <a:pt x="0" y="2631786"/>
                   </a:moveTo>
                   <a:lnTo>
-                    <a:pt x="175148" y="2631816"/>
-                  </a:lnTo>
-                  <a:lnTo>
-                    <a:pt x="175148" y="2546526"/>
-                  </a:lnTo>
-                  <a:lnTo>
-                    <a:pt x="262722" y="2546526"/>
-                  </a:lnTo>
-                  <a:lnTo>
-                    <a:pt x="262722" y="2462161"/>
-                  </a:lnTo>
-                  <a:lnTo>
-                    <a:pt x="350296" y="2462161"/>
-                  </a:lnTo>
-                  <a:lnTo>
-                    <a:pt x="350296" y="2378998"/>
-                  </a:lnTo>
-                  <a:lnTo>
-                    <a:pt x="700592" y="2378998"/>
-                  </a:lnTo>
-                  <a:lnTo>
-                    <a:pt x="700592" y="2215730"/>
-                  </a:lnTo>
-                  <a:lnTo>
-                    <a:pt x="788166" y="2215730"/>
-                  </a:lnTo>
-                  <a:lnTo>
-                    <a:pt x="788166" y="2135141"/>
-                  </a:lnTo>
-                  <a:lnTo>
-                    <a:pt x="1050888" y="2135141"/>
-                  </a:lnTo>
-                  <a:lnTo>
-                    <a:pt x="1050888" y="2055942"/>
-                  </a:lnTo>
-                  <a:lnTo>
-                    <a:pt x="1401184" y="2055942"/>
-                  </a:lnTo>
-                  <a:lnTo>
-                    <a:pt x="1401184" y="1977756"/>
-                  </a:lnTo>
-                  <a:lnTo>
-                    <a:pt x="1488758" y="1977756"/>
-                  </a:lnTo>
-                  <a:lnTo>
-                    <a:pt x="1488758" y="1900819"/>
-                  </a:lnTo>
-                  <a:lnTo>
-                    <a:pt x="1663906" y="1900819"/>
-                  </a:lnTo>
-                  <a:lnTo>
-                    <a:pt x="1663906" y="1824869"/>
-                  </a:lnTo>
-                  <a:lnTo>
-                    <a:pt x="1926628" y="1824869"/>
-                  </a:lnTo>
-                  <a:lnTo>
-                    <a:pt x="1926628" y="1676375"/>
-                  </a:lnTo>
-                  <a:lnTo>
-                    <a:pt x="2101777" y="1676375"/>
-                  </a:lnTo>
-                  <a:lnTo>
-                    <a:pt x="2101777" y="1601235"/>
-                  </a:lnTo>
-                  <a:lnTo>
-                    <a:pt x="2364499" y="1601235"/>
-                  </a:lnTo>
-                  <a:lnTo>
-                    <a:pt x="2364499" y="1527173"/>
-                  </a:lnTo>
-                  <a:lnTo>
-                    <a:pt x="3065091" y="1527173"/>
-                  </a:lnTo>
-                  <a:lnTo>
-                    <a:pt x="3065091" y="1452318"/>
-                  </a:lnTo>
-                  <a:lnTo>
-                    <a:pt x="3240239" y="1452318"/>
-                  </a:lnTo>
-                  <a:lnTo>
-                    <a:pt x="3240239" y="1376294"/>
-                  </a:lnTo>
-                  <a:lnTo>
-                    <a:pt x="3502961" y="1376294"/>
-                  </a:lnTo>
-                  <a:lnTo>
-                    <a:pt x="3502961" y="1300722"/>
-                  </a:lnTo>
-                  <a:lnTo>
-                    <a:pt x="3853257" y="1300722"/>
-                  </a:lnTo>
-                  <a:lnTo>
-                    <a:pt x="3853257" y="1225821"/>
-                  </a:lnTo>
-                  <a:lnTo>
-                    <a:pt x="4028405" y="1225821"/>
-                  </a:lnTo>
-                  <a:lnTo>
-                    <a:pt x="4028405" y="1150051"/>
-                  </a:lnTo>
-                  <a:lnTo>
-                    <a:pt x="4291128" y="1150051"/>
-                  </a:lnTo>
-                  <a:lnTo>
-                    <a:pt x="4291128" y="1075152"/>
-                  </a:lnTo>
-                  <a:lnTo>
-                    <a:pt x="4466276" y="1075152"/>
-                  </a:lnTo>
-                  <a:lnTo>
-                    <a:pt x="4466276" y="1000888"/>
-                  </a:lnTo>
-                  <a:lnTo>
-                    <a:pt x="4641424" y="1000888"/>
-                  </a:lnTo>
-                  <a:lnTo>
-                    <a:pt x="4641424" y="925129"/>
-                  </a:lnTo>
-                  <a:lnTo>
-                    <a:pt x="5342016" y="925129"/>
-                  </a:lnTo>
-                  <a:lnTo>
-                    <a:pt x="5342016" y="850236"/>
-                  </a:lnTo>
-                  <a:lnTo>
-                    <a:pt x="5429590" y="850236"/>
-                  </a:lnTo>
-                  <a:lnTo>
-                    <a:pt x="5429590" y="775651"/>
-                  </a:lnTo>
-                  <a:lnTo>
-                    <a:pt x="5692312" y="775651"/>
-                  </a:lnTo>
-                  <a:lnTo>
-                    <a:pt x="5692312" y="702325"/>
-                  </a:lnTo>
-                  <a:lnTo>
-                    <a:pt x="5779886" y="702325"/>
-                  </a:lnTo>
-                  <a:lnTo>
-                    <a:pt x="5779886" y="630084"/>
-                  </a:lnTo>
-                  <a:lnTo>
-                    <a:pt x="5867460" y="630084"/>
-                  </a:lnTo>
-                  <a:lnTo>
-                    <a:pt x="5867460" y="558270"/>
-                  </a:lnTo>
-                  <a:lnTo>
-                    <a:pt x="6042608" y="558270"/>
-                  </a:lnTo>
-                  <a:lnTo>
-                    <a:pt x="6042608" y="487021"/>
-                  </a:lnTo>
-                  <a:lnTo>
-                    <a:pt x="6130182" y="487021"/>
-                  </a:lnTo>
-                  <a:lnTo>
-                    <a:pt x="6130182" y="416712"/>
-                  </a:lnTo>
-                  <a:lnTo>
-                    <a:pt x="6217757" y="416712"/>
-                  </a:lnTo>
-                  <a:lnTo>
-                    <a:pt x="6217757" y="346626"/>
-                  </a:lnTo>
-                  <a:lnTo>
-                    <a:pt x="6305331" y="346626"/>
-                  </a:lnTo>
-                  <a:lnTo>
-                    <a:pt x="6305331" y="276674"/>
-                  </a:lnTo>
-                  <a:lnTo>
-                    <a:pt x="6480479" y="276674"/>
-                  </a:lnTo>
-                  <a:lnTo>
-                    <a:pt x="6480479" y="206292"/>
-                  </a:lnTo>
-                  <a:lnTo>
-                    <a:pt x="6568053" y="206292"/>
-                  </a:lnTo>
-                  <a:lnTo>
-                    <a:pt x="6568053" y="136813"/>
-                  </a:lnTo>
-                  <a:lnTo>
-                    <a:pt x="6743201" y="136813"/>
-                  </a:lnTo>
-                  <a:lnTo>
-                    <a:pt x="6743201" y="68325"/>
-                  </a:lnTo>
-                  <a:lnTo>
-                    <a:pt x="7005923" y="68325"/>
+                    <a:pt x="175148" y="2631786"/>
+                  </a:lnTo>
+                  <a:lnTo>
+                    <a:pt x="175148" y="2546479"/>
+                  </a:lnTo>
+                  <a:lnTo>
+                    <a:pt x="262722" y="2546479"/>
+                  </a:lnTo>
+                  <a:lnTo>
+                    <a:pt x="262722" y="2462101"/>
+                  </a:lnTo>
+                  <a:lnTo>
+                    <a:pt x="350296" y="2462101"/>
+                  </a:lnTo>
+                  <a:lnTo>
+                    <a:pt x="350296" y="2378925"/>
+                  </a:lnTo>
+                  <a:lnTo>
+                    <a:pt x="700592" y="2378925"/>
+                  </a:lnTo>
+                  <a:lnTo>
+                    <a:pt x="700592" y="2215626"/>
+                  </a:lnTo>
+                  <a:lnTo>
+                    <a:pt x="788166" y="2215626"/>
+                  </a:lnTo>
+                  <a:lnTo>
+                    <a:pt x="788166" y="2135047"/>
+                  </a:lnTo>
+                  <a:lnTo>
+                    <a:pt x="1050888" y="2135047"/>
+                  </a:lnTo>
+                  <a:lnTo>
+                    <a:pt x="1050888" y="2055869"/>
+                  </a:lnTo>
+                  <a:lnTo>
+                    <a:pt x="1401184" y="2055869"/>
+                  </a:lnTo>
+                  <a:lnTo>
+                    <a:pt x="1401184" y="1977707"/>
+                  </a:lnTo>
+                  <a:lnTo>
+                    <a:pt x="1488758" y="1977707"/>
+                  </a:lnTo>
+                  <a:lnTo>
+                    <a:pt x="1488758" y="1900795"/>
+                  </a:lnTo>
+                  <a:lnTo>
+                    <a:pt x="1663906" y="1900795"/>
+                  </a:lnTo>
+                  <a:lnTo>
+                    <a:pt x="1663906" y="1824812"/>
+                  </a:lnTo>
+                  <a:lnTo>
+                    <a:pt x="1926628" y="1824812"/>
+                  </a:lnTo>
+                  <a:lnTo>
+                    <a:pt x="1926628" y="1676276"/>
+                  </a:lnTo>
+                  <a:lnTo>
+                    <a:pt x="2101777" y="1676276"/>
+                  </a:lnTo>
+                  <a:lnTo>
+                    <a:pt x="2101777" y="1601012"/>
+                  </a:lnTo>
+                  <a:lnTo>
+                    <a:pt x="2364499" y="1601012"/>
+                  </a:lnTo>
+                  <a:lnTo>
+                    <a:pt x="2364499" y="1526840"/>
+                  </a:lnTo>
+                  <a:lnTo>
+                    <a:pt x="3065091" y="1526840"/>
+                  </a:lnTo>
+                  <a:lnTo>
+                    <a:pt x="3065091" y="1451802"/>
+                  </a:lnTo>
+                  <a:lnTo>
+                    <a:pt x="3240239" y="1451802"/>
+                  </a:lnTo>
+                  <a:lnTo>
+                    <a:pt x="3240239" y="1375693"/>
+                  </a:lnTo>
+                  <a:lnTo>
+                    <a:pt x="3502961" y="1375693"/>
+                  </a:lnTo>
+                  <a:lnTo>
+                    <a:pt x="3502961" y="1300073"/>
+                  </a:lnTo>
+                  <a:lnTo>
+                    <a:pt x="3853257" y="1300073"/>
+                  </a:lnTo>
+                  <a:lnTo>
+                    <a:pt x="3853257" y="1225154"/>
+                  </a:lnTo>
+                  <a:lnTo>
+                    <a:pt x="4028405" y="1225154"/>
+                  </a:lnTo>
+                  <a:lnTo>
+                    <a:pt x="4028405" y="1149375"/>
+                  </a:lnTo>
+                  <a:lnTo>
+                    <a:pt x="4291128" y="1149375"/>
+                  </a:lnTo>
+                  <a:lnTo>
+                    <a:pt x="4291128" y="1074466"/>
+                  </a:lnTo>
+                  <a:lnTo>
+                    <a:pt x="4466276" y="1074466"/>
+                  </a:lnTo>
+                  <a:lnTo>
+                    <a:pt x="4466276" y="1000177"/>
+                  </a:lnTo>
+                  <a:lnTo>
+                    <a:pt x="4641424" y="1000177"/>
+                  </a:lnTo>
+                  <a:lnTo>
+                    <a:pt x="4641424" y="924351"/>
+                  </a:lnTo>
+                  <a:lnTo>
+                    <a:pt x="5342016" y="924351"/>
+                  </a:lnTo>
+                  <a:lnTo>
+                    <a:pt x="5342016" y="849423"/>
+                  </a:lnTo>
+                  <a:lnTo>
+                    <a:pt x="5429590" y="849423"/>
+                  </a:lnTo>
+                  <a:lnTo>
+                    <a:pt x="5429590" y="774842"/>
+                  </a:lnTo>
+                  <a:lnTo>
+                    <a:pt x="5692312" y="774842"/>
+                  </a:lnTo>
+                  <a:lnTo>
+                    <a:pt x="5692312" y="701531"/>
+                  </a:lnTo>
+                  <a:lnTo>
+                    <a:pt x="5779886" y="701531"/>
+                  </a:lnTo>
+                  <a:lnTo>
+                    <a:pt x="5779886" y="629315"/>
+                  </a:lnTo>
+                  <a:lnTo>
+                    <a:pt x="5867460" y="629315"/>
+                  </a:lnTo>
+                  <a:lnTo>
+                    <a:pt x="5867460" y="557541"/>
+                  </a:lnTo>
+                  <a:lnTo>
+                    <a:pt x="6042608" y="557541"/>
+                  </a:lnTo>
+                  <a:lnTo>
+                    <a:pt x="6042608" y="486353"/>
+                  </a:lnTo>
+                  <a:lnTo>
+                    <a:pt x="6130182" y="486353"/>
+                  </a:lnTo>
+                  <a:lnTo>
+                    <a:pt x="6130182" y="416110"/>
+                  </a:lnTo>
+                  <a:lnTo>
+                    <a:pt x="6217757" y="416110"/>
+                  </a:lnTo>
+                  <a:lnTo>
+                    <a:pt x="6217757" y="346091"/>
+                  </a:lnTo>
+                  <a:lnTo>
+                    <a:pt x="6305331" y="346091"/>
+                  </a:lnTo>
+                  <a:lnTo>
+                    <a:pt x="6305331" y="276231"/>
+                  </a:lnTo>
+                  <a:lnTo>
+                    <a:pt x="6480479" y="276231"/>
+                  </a:lnTo>
+                  <a:lnTo>
+                    <a:pt x="6480479" y="205944"/>
+                  </a:lnTo>
+                  <a:lnTo>
+                    <a:pt x="6568053" y="205944"/>
+                  </a:lnTo>
+                  <a:lnTo>
+                    <a:pt x="6568053" y="136574"/>
+                  </a:lnTo>
+                  <a:lnTo>
+                    <a:pt x="6743201" y="136574"/>
+                  </a:lnTo>
+                  <a:lnTo>
+                    <a:pt x="6743201" y="68198"/>
+                  </a:lnTo>
+                  <a:lnTo>
+                    <a:pt x="7005923" y="68198"/>
                   </a:lnTo>
                   <a:lnTo>
                     <a:pt x="7005923" y="0"/>
@@ -3389,7 +3389,7 @@
           </p:nvSpPr>
           <p:spPr>
             <a:xfrm>
-              <a:off x="692708" y="4630530"/>
+              <a:off x="692708" y="4640654"/>
               <a:ext cx="155356" cy="80101"/>
             </a:xfrm>
             <a:prstGeom prst="rect">
@@ -3435,7 +3435,7 @@
           </p:nvSpPr>
           <p:spPr>
             <a:xfrm>
-              <a:off x="692708" y="3720689"/>
+              <a:off x="692708" y="3740936"/>
               <a:ext cx="155356" cy="80101"/>
             </a:xfrm>
             <a:prstGeom prst="rect">
@@ -3481,7 +3481,7 @@
           </p:nvSpPr>
           <p:spPr>
             <a:xfrm>
-              <a:off x="692708" y="2810849"/>
+              <a:off x="692708" y="2841219"/>
               <a:ext cx="155356" cy="80101"/>
             </a:xfrm>
             <a:prstGeom prst="rect">
@@ -3962,7 +3962,7 @@
                   <a:latin typeface="Helvetica"/>
                   <a:cs typeface="Helvetica"/>
                 </a:rPr>
-                <a:t>Discrep &gt;= +25 vs &lt;+25: subHR = 2.18 (95% CI 0.79-6.07), p = 0.134</a:t>
+                <a:t>Discrep &gt;= +25 vs &lt;+25: subHR = 2.20 (95% CI 0.79-6.10), p = 0.129</a:t>
               </a:r>
             </a:p>
           </p:txBody>
